--- a/assets/pptx/catalog-228.pptx
+++ b/assets/pptx/catalog-228.pptx
@@ -3371,7 +3371,7 @@
                 <a:ea typeface="Ebrima"/>
                 <a:cs typeface="Ebrima"/>
               </a:rPr>
-              <a:t>ልጥራህ በማለዳ ልጥራህ በጠዋቱ (2x)</a:t>
+              <a:t>ልጥራህ በማለዳ ልጥራህ በጠዋቱ 2x</a:t>
             </a:r>
           </a:p>
           <a:p>
@@ -3407,7 +3407,7 @@
                 <a:ea typeface="Ebrima"/>
                 <a:cs typeface="Ebrima"/>
               </a:rPr>
-              <a:t>ኢየሱስ የጥንቱ (2x)</a:t>
+              <a:t>ኢየሱስ የጥንቱ 2x</a:t>
             </a:r>
           </a:p>
         </p:txBody>
@@ -3577,7 +3577,7 @@
                 <a:ea typeface="Ebrima"/>
                 <a:cs typeface="Ebrima"/>
               </a:rPr>
-              <a:t>እምበረከካለሁ ጉልበቴ ይታጠፋል ሸክሜ ይራገፋል (2x)</a:t>
+              <a:t>እምበረከካለሁ ጉልበቴ ይታጠፋል ሸክሜ ይራገፋል 2x</a:t>
             </a:r>
           </a:p>
           <a:p>
@@ -3613,7 +3613,7 @@
                 <a:ea typeface="Ebrima"/>
                 <a:cs typeface="Ebrima"/>
               </a:rPr>
-              <a:t>እምበረከካለሁ ጉልበቴ ይታጠፋል ሸክሜ ይራገፋል (2x)</a:t>
+              <a:t>እምበረከካለሁ ጉልበቴ ይታጠፋል ሸክሜ ይራገፋል 2x</a:t>
             </a:r>
           </a:p>
         </p:txBody>
@@ -3770,7 +3770,7 @@
                 <a:ea typeface="Ebrima"/>
                 <a:cs typeface="Ebrima"/>
               </a:rPr>
-              <a:t>ሰምቶ የሚመልስ አምላክ ስላለኝ ነው (2x)</a:t>
+              <a:t>ሰምቶ የሚመልስ አምላክ ስላለኝ ነው 2x</a:t>
             </a:r>
           </a:p>
         </p:txBody>
@@ -3855,7 +3855,7 @@
                 <a:ea typeface="Ebrima"/>
                 <a:cs typeface="Ebrima"/>
               </a:rPr>
-              <a:t>እምበረከካለሁ ጉልበቴ ይታጠፋል ሸክሜ ይራገፋል (2x)</a:t>
+              <a:t>እምበረከካለሁ ጉልበቴ ይታጠፋል ሸክሜ ይራገፋል 2x</a:t>
             </a:r>
           </a:p>
           <a:p>
@@ -3891,7 +3891,7 @@
                 <a:ea typeface="Ebrima"/>
                 <a:cs typeface="Ebrima"/>
               </a:rPr>
-              <a:t>እምበረከካለሁ ጉልበቴ ይታጠፋል ሸክሜ ይራገፋል (2x)</a:t>
+              <a:t>እምበረከካለሁ ጉልበቴ ይታጠፋል ሸክሜ ይራገፋል 2x</a:t>
             </a:r>
           </a:p>
         </p:txBody>
@@ -4048,7 +4048,7 @@
                 <a:ea typeface="Ebrima"/>
                 <a:cs typeface="Ebrima"/>
               </a:rPr>
-              <a:t>በፊቱ ወድቄ ያለ መልስ አልሄድም (2x)</a:t>
+              <a:t>በፊቱ ወድቄ ያለ መልስ አልሄድም 2x</a:t>
             </a:r>
           </a:p>
         </p:txBody>
@@ -4133,7 +4133,7 @@
                 <a:ea typeface="Ebrima"/>
                 <a:cs typeface="Ebrima"/>
               </a:rPr>
-              <a:t>እምበረከካለሁ ጉልበቴ ይታጠፋል ሸክሜ ይራገፋል (2x)</a:t>
+              <a:t>እምበረከካለሁ ጉልበቴ ይታጠፋል ሸክሜ ይራገፋል 2x</a:t>
             </a:r>
           </a:p>
           <a:p>
@@ -4169,7 +4169,7 @@
                 <a:ea typeface="Ebrima"/>
                 <a:cs typeface="Ebrima"/>
               </a:rPr>
-              <a:t>እምበረከካለሁ ጉልበቴ ይታጠፋል ሸክሜ ይራገፋል (2x)</a:t>
+              <a:t>እምበረከካለሁ ጉልበቴ ይታጠፋል ሸክሜ ይራገፋል 2x</a:t>
             </a:r>
           </a:p>
         </p:txBody>
@@ -4326,7 +4326,7 @@
                 <a:ea typeface="Ebrima"/>
                 <a:cs typeface="Ebrima"/>
               </a:rPr>
-              <a:t>ማንነቱን በደምብ ገብቶኝ ነው አውቄ (2x)</a:t>
+              <a:t>ማንነቱን በደምብ ገብቶኝ ነው አውቄ 2x</a:t>
             </a:r>
           </a:p>
         </p:txBody>
@@ -4411,7 +4411,7 @@
                 <a:ea typeface="Ebrima"/>
                 <a:cs typeface="Ebrima"/>
               </a:rPr>
-              <a:t>እምበረከካለሁ ጉልበቴ ይታጠፋል ሸክሜ ይራገፋል (2x)</a:t>
+              <a:t>እምበረከካለሁ ጉልበቴ ይታጠፋል ሸክሜ ይራገፋል 2x</a:t>
             </a:r>
           </a:p>
           <a:p>
@@ -4447,7 +4447,7 @@
                 <a:ea typeface="Ebrima"/>
                 <a:cs typeface="Ebrima"/>
               </a:rPr>
-              <a:t>እምበረከካለሁ ጉልበቴ ይታጠፋል ሸክሜ ይራገፋል (2x)</a:t>
+              <a:t>እምበረከካለሁ ጉልበቴ ይታጠፋል ሸክሜ ይራገፋል 2x</a:t>
             </a:r>
           </a:p>
         </p:txBody>
